--- a/classes/parte-4-seguridad-de-aplicaciones-web/097-xss-almacenado-y-basado-en-dom/clase-097-presentacion.pptx
+++ b/classes/parte-4-seguridad-de-aplicaciones-web/097-xss-almacenado-y-basado-en-dom/clase-097-presentacion.pptx
@@ -17,6 +17,9 @@
     <p:sldId id="265" r:id="rId16"/>
     <p:sldId id="266" r:id="rId17"/>
     <p:sldId id="267" r:id="rId18"/>
+    <p:sldId id="268" r:id="rId19"/>
+    <p:sldId id="269" r:id="rId20"/>
+    <p:sldId id="270" r:id="rId21"/>
   </p:sldIdLst>
   <p:sldSz cx="9144000" cy="6858000" type="screen4x3"/>
   <p:notesSz cx="6858000" cy="9144000"/>
@@ -3198,7 +3201,7 @@
                   <a:srgbClr val="0B3D2E"/>
                 </a:solidFill>
               </a:rPr>
-              <a:t>⚠️ Errores comunes</a:t>
+              <a:t>✍️ Ejercicios</a:t>
             </a:r>
           </a:p>
         </p:txBody>
@@ -3236,67 +3239,82 @@
                   <a:srgbClr val="22282E"/>
                 </a:solidFill>
               </a:rPr>
-              <a:t>•  El payload se guarda pero no ejecuta — Se codifica al renderizar; busca otro campo/sink</a:t>
-            </a:r>
-          </a:p>
-          <a:p>
-            <a:pPr>
-              <a:spcAft>
-                <a:spcPts val="600"/>
-              </a:spcAft>
-            </a:pPr>
-            <a:r>
-              <a:rPr sz="1500">
-                <a:solidFill>
-                  <a:srgbClr val="22282E"/>
-                </a:solidFill>
-              </a:rPr>
-              <a:t>•  DOM XSS no reproduce — El source no es controlable en ese flujo; revisa el JS</a:t>
-            </a:r>
-          </a:p>
-          <a:p>
-            <a:pPr>
-              <a:spcAft>
-                <a:spcPts val="600"/>
-              </a:spcAft>
-            </a:pPr>
-            <a:r>
-              <a:rPr sz="1500">
-                <a:solidFill>
-                  <a:srgbClr val="22282E"/>
-                </a:solidFill>
-              </a:rPr>
-              <a:t>•  React "no permite" XSS — dangerouslySetInnerHTML o refs manuales lo reintroducen</a:t>
-            </a:r>
-          </a:p>
-          <a:p>
-            <a:pPr>
-              <a:spcAft>
-                <a:spcPts val="600"/>
-              </a:spcAft>
-            </a:pPr>
-            <a:r>
-              <a:rPr sz="1500">
-                <a:solidFill>
-                  <a:srgbClr val="22282E"/>
-                </a:solidFill>
-              </a:rPr>
-              <a:t>•  DOMPurify no bloquea — Config permisiva; revisa allowlist de tags/atributos</a:t>
-            </a:r>
-          </a:p>
-          <a:p>
-            <a:pPr>
-              <a:spcAft>
-                <a:spcPts val="600"/>
-              </a:spcAft>
-            </a:pPr>
-            <a:r>
-              <a:rPr sz="1500">
-                <a:solidFill>
-                  <a:srgbClr val="22282E"/>
-                </a:solidFill>
-              </a:rPr>
-              <a:t>•  alert salta solo para ti — Contexto de sesión; prueba en pestaña anónima</a:t>
+              <a:t>•  Enumera 5 sinks peligrosos en JavaScript y por qué lo son.</a:t>
+            </a:r>
+          </a:p>
+          <a:p>
+            <a:pPr>
+              <a:spcAft>
+                <a:spcPts val="600"/>
+              </a:spcAft>
+            </a:pPr>
+            <a:r>
+              <a:rPr sz="1500">
+                <a:solidFill>
+                  <a:srgbClr val="22282E"/>
+                </a:solidFill>
+              </a:rPr>
+              <a:t>•  Explica por qué el stored XSS es más grave que el reflejado.</a:t>
+            </a:r>
+          </a:p>
+          <a:p>
+            <a:pPr>
+              <a:spcAft>
+                <a:spcPts val="600"/>
+              </a:spcAft>
+            </a:pPr>
+            <a:r>
+              <a:rPr sz="1500">
+                <a:solidFill>
+                  <a:srgbClr val="22282E"/>
+                </a:solidFill>
+              </a:rPr>
+              <a:t>•  Encuentra un DOM XSS donde el servidor nunca vea el payload y explícalo.</a:t>
+            </a:r>
+          </a:p>
+          <a:p>
+            <a:pPr>
+              <a:spcAft>
+                <a:spcPts val="600"/>
+              </a:spcAft>
+            </a:pPr>
+            <a:r>
+              <a:rPr sz="1500">
+                <a:solidFill>
+                  <a:srgbClr val="22282E"/>
+                </a:solidFill>
+              </a:rPr>
+              <a:t>•  Sanitiza un campo con DOMPurify y demuestra que bloquea tu payload.</a:t>
+            </a:r>
+          </a:p>
+          <a:p>
+            <a:pPr>
+              <a:spcAft>
+                <a:spcPts val="600"/>
+              </a:spcAft>
+            </a:pPr>
+            <a:r>
+              <a:rPr sz="1500">
+                <a:solidFill>
+                  <a:srgbClr val="22282E"/>
+                </a:solidFill>
+              </a:rPr>
+              <a:t>•  Investiga cómo React mitiga XSS por defecto y cuándo dangerouslySetInnerHTML lo reintroduce.</a:t>
+            </a:r>
+          </a:p>
+          <a:p>
+            <a:pPr>
+              <a:spcAft>
+                <a:spcPts val="600"/>
+              </a:spcAft>
+            </a:pPr>
+            <a:r>
+              <a:rPr sz="1500">
+                <a:solidFill>
+                  <a:srgbClr val="22282E"/>
+                </a:solidFill>
+              </a:rPr>
+              <a:t>•  Diseña una CSP con Trusted Types para el lab.</a:t>
             </a:r>
           </a:p>
         </p:txBody>
@@ -3347,7 +3365,7 @@
                   <a:srgbClr val="0B3D2E"/>
                 </a:solidFill>
               </a:rPr>
-              <a:t>❓ Preguntas frecuentes</a:t>
+              <a:t>📝 Reto verificable</a:t>
             </a:r>
           </a:p>
         </p:txBody>
@@ -3385,82 +3403,22 @@
                   <a:srgbClr val="22282E"/>
                 </a:solidFill>
               </a:rPr>
-              <a:t>•  ❓ ¿Los frameworks modernos eliminan el XSS?</a:t>
-            </a:r>
-          </a:p>
-          <a:p>
-            <a:pPr>
-              <a:spcAft>
-                <a:spcPts val="600"/>
-              </a:spcAft>
-            </a:pPr>
-            <a:r>
-              <a:rPr sz="1500">
-                <a:solidFill>
-                  <a:srgbClr val="22282E"/>
-                </a:solidFill>
-              </a:rPr>
-              <a:t>•  Reducen mucho el riesgo por escapado automático, pero APIs de escape manual y DOM XSS siguen siendo posibles.</a:t>
-            </a:r>
-          </a:p>
-          <a:p>
-            <a:pPr>
-              <a:spcAft>
-                <a:spcPts val="600"/>
-              </a:spcAft>
-            </a:pPr>
-            <a:r>
-              <a:rPr sz="1500">
-                <a:solidFill>
-                  <a:srgbClr val="22282E"/>
-                </a:solidFill>
-              </a:rPr>
-              <a:t>•  ❓ ¿Cómo encuentro DOM XSS?</a:t>
-            </a:r>
-          </a:p>
-          <a:p>
-            <a:pPr>
-              <a:spcAft>
-                <a:spcPts val="600"/>
-              </a:spcAft>
-            </a:pPr>
-            <a:r>
-              <a:rPr sz="1500">
-                <a:solidFill>
-                  <a:srgbClr val="22282E"/>
-                </a:solidFill>
-              </a:rPr>
-              <a:t>•  Rastrea sources y sinks en el JavaScript. Herramientas como DOM Invader (de Burp) ayudan a automatizarlo.</a:t>
-            </a:r>
-          </a:p>
-          <a:p>
-            <a:pPr>
-              <a:spcAft>
-                <a:spcPts val="600"/>
-              </a:spcAft>
-            </a:pPr>
-            <a:r>
-              <a:rPr sz="1500">
-                <a:solidFill>
-                  <a:srgbClr val="22282E"/>
-                </a:solidFill>
-              </a:rPr>
-              <a:t>•  ❓ ¿Sanitizar en cliente o servidor?</a:t>
-            </a:r>
-          </a:p>
-          <a:p>
-            <a:pPr>
-              <a:spcAft>
-                <a:spcPts val="600"/>
-              </a:spcAft>
-            </a:pPr>
-            <a:r>
-              <a:rPr sz="1500">
-                <a:solidFill>
-                  <a:srgbClr val="22282E"/>
-                </a:solidFill>
-              </a:rPr>
-              <a:t>•  Ambos, según el caso. Para HTML enriquecido en el cliente, DOMPurify; en el servidor, codificación de salida por contexto.</a:t>
+              <a:t>•  Logra un XSS almacenado en Juice Shop que ejecute una acción en nombre de otro usuario (no solo alert), y luego propón la corrección con sanitización.</a:t>
+            </a:r>
+          </a:p>
+          <a:p>
+            <a:pPr>
+              <a:spcAft>
+                <a:spcPts val="600"/>
+              </a:spcAft>
+            </a:pPr>
+            <a:r>
+              <a:rPr sz="1500">
+                <a:solidFill>
+                  <a:srgbClr val="22282E"/>
+                </a:solidFill>
+              </a:rPr>
+              <a:t>•  Criterio de aceptación: demuestras el payload persistente disparándose en una segunda sesión y realizando una acción, e identificas el source, el sink y la defensa concreta.</a:t>
             </a:r>
           </a:p>
         </p:txBody>
@@ -3511,7 +3469,7 @@
                   <a:srgbClr val="0B3D2E"/>
                 </a:solidFill>
               </a:rPr>
-              <a:t>🔗 Referencias</a:t>
+              <a:t>⚠️ Errores comunes</a:t>
             </a:r>
           </a:p>
         </p:txBody>
@@ -3549,6 +3507,319 @@
                   <a:srgbClr val="22282E"/>
                 </a:solidFill>
               </a:rPr>
+              <a:t>•  El payload se guarda pero no ejecuta — Se codifica al renderizar; busca otro campo/sink</a:t>
+            </a:r>
+          </a:p>
+          <a:p>
+            <a:pPr>
+              <a:spcAft>
+                <a:spcPts val="600"/>
+              </a:spcAft>
+            </a:pPr>
+            <a:r>
+              <a:rPr sz="1500">
+                <a:solidFill>
+                  <a:srgbClr val="22282E"/>
+                </a:solidFill>
+              </a:rPr>
+              <a:t>•  DOM XSS no reproduce — El source no es controlable en ese flujo; revisa el JS</a:t>
+            </a:r>
+          </a:p>
+          <a:p>
+            <a:pPr>
+              <a:spcAft>
+                <a:spcPts val="600"/>
+              </a:spcAft>
+            </a:pPr>
+            <a:r>
+              <a:rPr sz="1500">
+                <a:solidFill>
+                  <a:srgbClr val="22282E"/>
+                </a:solidFill>
+              </a:rPr>
+              <a:t>•  React "no permite" XSS — dangerouslySetInnerHTML o refs manuales lo reintroducen</a:t>
+            </a:r>
+          </a:p>
+          <a:p>
+            <a:pPr>
+              <a:spcAft>
+                <a:spcPts val="600"/>
+              </a:spcAft>
+            </a:pPr>
+            <a:r>
+              <a:rPr sz="1500">
+                <a:solidFill>
+                  <a:srgbClr val="22282E"/>
+                </a:solidFill>
+              </a:rPr>
+              <a:t>•  DOMPurify no bloquea — Config permisiva; revisa allowlist de tags/atributos</a:t>
+            </a:r>
+          </a:p>
+          <a:p>
+            <a:pPr>
+              <a:spcAft>
+                <a:spcPts val="600"/>
+              </a:spcAft>
+            </a:pPr>
+            <a:r>
+              <a:rPr sz="1500">
+                <a:solidFill>
+                  <a:srgbClr val="22282E"/>
+                </a:solidFill>
+              </a:rPr>
+              <a:t>•  alert salta solo para ti — Contexto de sesión; prueba en pestaña anónima</a:t>
+            </a:r>
+          </a:p>
+        </p:txBody>
+      </p:sp>
+    </p:spTree>
+  </p:cSld>
+  <p:clrMapOvr>
+    <a:masterClrMapping/>
+  </p:clrMapOvr>
+</p:sld>
+</file>
+
+<file path=ppt/slides/slide13.xml><?xml version="1.0" encoding="utf-8"?>
+<p:sld xmlns:a="http://schemas.openxmlformats.org/drawingml/2006/main" xmlns:p="http://schemas.openxmlformats.org/presentationml/2006/main" xmlns:r="http://schemas.openxmlformats.org/officeDocument/2006/relationships">
+  <p:cSld>
+    <p:spTree>
+      <p:nvGrpSpPr>
+        <p:cNvPr id="1" name=""/>
+        <p:cNvGrpSpPr/>
+        <p:nvPr/>
+      </p:nvGrpSpPr>
+      <p:grpSpPr/>
+      <p:sp>
+        <p:nvSpPr>
+          <p:cNvPr id="2" name="TextBox 1"/>
+          <p:cNvSpPr txBox="1"/>
+          <p:nvPr/>
+        </p:nvSpPr>
+        <p:spPr>
+          <a:xfrm>
+            <a:off x="457200" y="320040"/>
+            <a:ext cx="8229600" cy="822960"/>
+          </a:xfrm>
+          <a:prstGeom prst="rect">
+            <a:avLst/>
+          </a:prstGeom>
+          <a:noFill/>
+        </p:spPr>
+        <p:txBody>
+          <a:bodyPr wrap="square">
+            <a:spAutoFit/>
+          </a:bodyPr>
+          <a:lstStyle/>
+          <a:p>
+            <a:r>
+              <a:rPr sz="2600" b="1">
+                <a:solidFill>
+                  <a:srgbClr val="0B3D2E"/>
+                </a:solidFill>
+              </a:rPr>
+              <a:t>❓ Preguntas frecuentes</a:t>
+            </a:r>
+          </a:p>
+        </p:txBody>
+      </p:sp>
+      <p:sp>
+        <p:nvSpPr>
+          <p:cNvPr id="3" name="TextBox 2"/>
+          <p:cNvSpPr txBox="1"/>
+          <p:nvPr/>
+        </p:nvSpPr>
+        <p:spPr>
+          <a:xfrm>
+            <a:off x="457200" y="1280160"/>
+            <a:ext cx="8229600" cy="4937760"/>
+          </a:xfrm>
+          <a:prstGeom prst="rect">
+            <a:avLst/>
+          </a:prstGeom>
+          <a:noFill/>
+        </p:spPr>
+        <p:txBody>
+          <a:bodyPr wrap="square">
+            <a:spAutoFit/>
+          </a:bodyPr>
+          <a:lstStyle/>
+          <a:p>
+            <a:pPr>
+              <a:spcAft>
+                <a:spcPts val="600"/>
+              </a:spcAft>
+            </a:pPr>
+            <a:r>
+              <a:rPr sz="1500">
+                <a:solidFill>
+                  <a:srgbClr val="22282E"/>
+                </a:solidFill>
+              </a:rPr>
+              <a:t>•  ❓ ¿Los frameworks modernos eliminan el XSS?</a:t>
+            </a:r>
+          </a:p>
+          <a:p>
+            <a:pPr>
+              <a:spcAft>
+                <a:spcPts val="600"/>
+              </a:spcAft>
+            </a:pPr>
+            <a:r>
+              <a:rPr sz="1500">
+                <a:solidFill>
+                  <a:srgbClr val="22282E"/>
+                </a:solidFill>
+              </a:rPr>
+              <a:t>•  Reducen mucho el riesgo por escapado automático, pero APIs de escape manual y DOM XSS siguen siendo posibles.</a:t>
+            </a:r>
+          </a:p>
+          <a:p>
+            <a:pPr>
+              <a:spcAft>
+                <a:spcPts val="600"/>
+              </a:spcAft>
+            </a:pPr>
+            <a:r>
+              <a:rPr sz="1500">
+                <a:solidFill>
+                  <a:srgbClr val="22282E"/>
+                </a:solidFill>
+              </a:rPr>
+              <a:t>•  ❓ ¿Cómo encuentro DOM XSS?</a:t>
+            </a:r>
+          </a:p>
+          <a:p>
+            <a:pPr>
+              <a:spcAft>
+                <a:spcPts val="600"/>
+              </a:spcAft>
+            </a:pPr>
+            <a:r>
+              <a:rPr sz="1500">
+                <a:solidFill>
+                  <a:srgbClr val="22282E"/>
+                </a:solidFill>
+              </a:rPr>
+              <a:t>•  Rastrea sources y sinks en el JavaScript. Herramientas como DOM Invader (de Burp) ayudan a automatizarlo.</a:t>
+            </a:r>
+          </a:p>
+          <a:p>
+            <a:pPr>
+              <a:spcAft>
+                <a:spcPts val="600"/>
+              </a:spcAft>
+            </a:pPr>
+            <a:r>
+              <a:rPr sz="1500">
+                <a:solidFill>
+                  <a:srgbClr val="22282E"/>
+                </a:solidFill>
+              </a:rPr>
+              <a:t>•  ❓ ¿Sanitizar en cliente o servidor?</a:t>
+            </a:r>
+          </a:p>
+          <a:p>
+            <a:pPr>
+              <a:spcAft>
+                <a:spcPts val="600"/>
+              </a:spcAft>
+            </a:pPr>
+            <a:r>
+              <a:rPr sz="1500">
+                <a:solidFill>
+                  <a:srgbClr val="22282E"/>
+                </a:solidFill>
+              </a:rPr>
+              <a:t>•  Ambos, según el caso. Para HTML enriquecido en el cliente, DOMPurify; en el servidor, codificación de salida por contexto.</a:t>
+            </a:r>
+          </a:p>
+        </p:txBody>
+      </p:sp>
+    </p:spTree>
+  </p:cSld>
+  <p:clrMapOvr>
+    <a:masterClrMapping/>
+  </p:clrMapOvr>
+</p:sld>
+</file>
+
+<file path=ppt/slides/slide14.xml><?xml version="1.0" encoding="utf-8"?>
+<p:sld xmlns:a="http://schemas.openxmlformats.org/drawingml/2006/main" xmlns:p="http://schemas.openxmlformats.org/presentationml/2006/main" xmlns:r="http://schemas.openxmlformats.org/officeDocument/2006/relationships">
+  <p:cSld>
+    <p:spTree>
+      <p:nvGrpSpPr>
+        <p:cNvPr id="1" name=""/>
+        <p:cNvGrpSpPr/>
+        <p:nvPr/>
+      </p:nvGrpSpPr>
+      <p:grpSpPr/>
+      <p:sp>
+        <p:nvSpPr>
+          <p:cNvPr id="2" name="TextBox 1"/>
+          <p:cNvSpPr txBox="1"/>
+          <p:nvPr/>
+        </p:nvSpPr>
+        <p:spPr>
+          <a:xfrm>
+            <a:off x="457200" y="320040"/>
+            <a:ext cx="8229600" cy="822960"/>
+          </a:xfrm>
+          <a:prstGeom prst="rect">
+            <a:avLst/>
+          </a:prstGeom>
+          <a:noFill/>
+        </p:spPr>
+        <p:txBody>
+          <a:bodyPr wrap="square">
+            <a:spAutoFit/>
+          </a:bodyPr>
+          <a:lstStyle/>
+          <a:p>
+            <a:r>
+              <a:rPr sz="2600" b="1">
+                <a:solidFill>
+                  <a:srgbClr val="0B3D2E"/>
+                </a:solidFill>
+              </a:rPr>
+              <a:t>🔗 Referencias</a:t>
+            </a:r>
+          </a:p>
+        </p:txBody>
+      </p:sp>
+      <p:sp>
+        <p:nvSpPr>
+          <p:cNvPr id="3" name="TextBox 2"/>
+          <p:cNvSpPr txBox="1"/>
+          <p:nvPr/>
+        </p:nvSpPr>
+        <p:spPr>
+          <a:xfrm>
+            <a:off x="457200" y="1280160"/>
+            <a:ext cx="8229600" cy="4937760"/>
+          </a:xfrm>
+          <a:prstGeom prst="rect">
+            <a:avLst/>
+          </a:prstGeom>
+          <a:noFill/>
+        </p:spPr>
+        <p:txBody>
+          <a:bodyPr wrap="square">
+            <a:spAutoFit/>
+          </a:bodyPr>
+          <a:lstStyle/>
+          <a:p>
+            <a:pPr>
+              <a:spcAft>
+                <a:spcPts val="600"/>
+              </a:spcAft>
+            </a:pPr>
+            <a:r>
+              <a:rPr sz="1500">
+                <a:solidFill>
+                  <a:srgbClr val="22282E"/>
+                </a:solidFill>
+              </a:rPr>
               <a:t>•  Yaworski, Real-World Bug Hunting, cap. de XSS.</a:t>
             </a:r>
           </a:p>
@@ -3599,6 +3870,81 @@
           </a:p>
         </p:txBody>
       </p:sp>
+    </p:spTree>
+  </p:cSld>
+  <p:clrMapOvr>
+    <a:masterClrMapping/>
+  </p:clrMapOvr>
+</p:sld>
+</file>
+
+<file path=ppt/slides/slide15.xml><?xml version="1.0" encoding="utf-8"?>
+<p:sld xmlns:a="http://schemas.openxmlformats.org/drawingml/2006/main" xmlns:p="http://schemas.openxmlformats.org/presentationml/2006/main" xmlns:r="http://schemas.openxmlformats.org/officeDocument/2006/relationships">
+  <p:cSld>
+    <p:spTree>
+      <p:nvGrpSpPr>
+        <p:cNvPr id="1" name=""/>
+        <p:cNvGrpSpPr/>
+        <p:nvPr/>
+      </p:nvGrpSpPr>
+      <p:grpSpPr/>
+      <p:sp>
+        <p:nvSpPr>
+          <p:cNvPr id="2" name="TextBox 1"/>
+          <p:cNvSpPr txBox="1"/>
+          <p:nvPr/>
+        </p:nvSpPr>
+        <p:spPr>
+          <a:xfrm>
+            <a:off x="457200" y="274320"/>
+            <a:ext cx="8229600" cy="640080"/>
+          </a:xfrm>
+          <a:prstGeom prst="rect">
+            <a:avLst/>
+          </a:prstGeom>
+          <a:noFill/>
+        </p:spPr>
+        <p:txBody>
+          <a:bodyPr wrap="square">
+            <a:spAutoFit/>
+          </a:bodyPr>
+          <a:lstStyle/>
+          <a:p>
+            <a:r>
+              <a:rPr sz="2200" b="1">
+                <a:solidFill>
+                  <a:srgbClr val="0B3D2E"/>
+                </a:solidFill>
+              </a:rPr>
+              <a:t>Diagrama de la clase</a:t>
+            </a:r>
+          </a:p>
+        </p:txBody>
+      </p:sp>
+      <p:pic>
+        <p:nvPicPr>
+          <p:cNvPr id="3" name="Picture 2" descr="ed85f4d1f6bc2859.png"/>
+          <p:cNvPicPr>
+            <a:picLocks noChangeAspect="1"/>
+          </p:cNvPicPr>
+          <p:nvPr/>
+        </p:nvPicPr>
+        <p:blipFill>
+          <a:blip r:embed="rId2"/>
+          <a:stretch>
+            <a:fillRect/>
+          </a:stretch>
+        </p:blipFill>
+        <p:spPr>
+          <a:xfrm>
+            <a:off x="457200" y="3351276"/>
+            <a:ext cx="8229600" cy="795528"/>
+          </a:xfrm>
+          <a:prstGeom prst="rect">
+            <a:avLst/>
+          </a:prstGeom>
+        </p:spPr>
+      </p:pic>
     </p:spTree>
   </p:cSld>
   <p:clrMapOvr>
@@ -3683,7 +4029,7 @@
                   <a:srgbClr val="22282E"/>
                 </a:solidFill>
               </a:rPr>
-              <a:t>•  Dominar las dos variantes de XSS más peligrosas: el almacenado (stored), que persiste y afecta a todos los usuarios, y el basado en DOM, que ocurre íntegramente en el navegador. Aprenderás a rastrear el flujo de datos desde la fuente (source) hasta el punto de ejecución (sink).</a:t>
+              <a:t>•  Dominar las dos variantes de XSS más peligrosas: el almacenado (stored), que persiste y afecta a todos los usuarios, y el basado en DOM, que ocurre íntegramente en el navegador. Aprenderás a rastrear…</a:t>
             </a:r>
           </a:p>
         </p:txBody>
@@ -4077,7 +4423,7 @@
                   <a:srgbClr val="0B3D2E"/>
                 </a:solidFill>
               </a:rPr>
-              <a:t>📖 Definiciones y características</a:t>
+              <a:t>🧠 Explicación en profundidad</a:t>
             </a:r>
           </a:p>
         </p:txBody>
@@ -4115,82 +4461,97 @@
                   <a:srgbClr val="22282E"/>
                 </a:solidFill>
               </a:rPr>
-              <a:t>•  Stored XSS: el payload se guarda en el servidor y se sirve a otros. Característica: no requiere enlace; se dispara solo al ver el contenido.</a:t>
-            </a:r>
-          </a:p>
-          <a:p>
-            <a:pPr>
-              <a:spcAft>
-                <a:spcPts val="600"/>
-              </a:spcAft>
-            </a:pPr>
-            <a:r>
-              <a:rPr sz="1500">
-                <a:solidFill>
-                  <a:srgbClr val="22282E"/>
-                </a:solidFill>
-              </a:rPr>
-              <a:t>•  DOM XSS: el flujo peligroso ocurre en el JavaScript del cliente. Característica: el servidor puede no ver nunca el payload.</a:t>
-            </a:r>
-          </a:p>
-          <a:p>
-            <a:pPr>
-              <a:spcAft>
-                <a:spcPts val="600"/>
-              </a:spcAft>
-            </a:pPr>
-            <a:r>
-              <a:rPr sz="1500">
-                <a:solidFill>
-                  <a:srgbClr val="22282E"/>
-                </a:solidFill>
-              </a:rPr>
-              <a:t>•  Source: entrada controlable en el DOM (location.hash, document.referrer). Característica: origen del dato no confiable.</a:t>
-            </a:r>
-          </a:p>
-          <a:p>
-            <a:pPr>
-              <a:spcAft>
-                <a:spcPts val="600"/>
-              </a:spcAft>
-            </a:pPr>
-            <a:r>
-              <a:rPr sz="1500">
-                <a:solidFill>
-                  <a:srgbClr val="22282E"/>
-                </a:solidFill>
-              </a:rPr>
-              <a:t>•  Sink: función que ejecuta/inserta datos (innerHTML, eval). Característica: punto donde detona el XSS.</a:t>
-            </a:r>
-          </a:p>
-          <a:p>
-            <a:pPr>
-              <a:spcAft>
-                <a:spcPts val="600"/>
-              </a:spcAft>
-            </a:pPr>
-            <a:r>
-              <a:rPr sz="1500">
-                <a:solidFill>
-                  <a:srgbClr val="22282E"/>
-                </a:solidFill>
-              </a:rPr>
-              <a:t>•  DOMPurify: librería que sanitiza HTML en el cliente. Característica: defensa fiable frente a DOM XSS.</a:t>
-            </a:r>
-          </a:p>
-          <a:p>
-            <a:pPr>
-              <a:spcAft>
-                <a:spcPts val="600"/>
-              </a:spcAft>
-            </a:pPr>
-            <a:r>
-              <a:rPr sz="1500">
-                <a:solidFill>
-                  <a:srgbClr val="22282E"/>
-                </a:solidFill>
-              </a:rPr>
-              <a:t>•  Trusted Types: API del navegador que restringe asignaciones peligrosas. Característica: previene sinks inseguros por diseño.</a:t>
+              <a:t>•  El XSS almacenado (stored) es la variante más peligrosa porque el payload se guarda en el</a:t>
+            </a:r>
+          </a:p>
+          <a:p>
+            <a:pPr>
+              <a:spcAft>
+                <a:spcPts val="600"/>
+              </a:spcAft>
+            </a:pPr>
+            <a:r>
+              <a:rPr sz="1500">
+                <a:solidFill>
+                  <a:srgbClr val="22282E"/>
+                </a:solidFill>
+              </a:rPr>
+              <a:t>•  servidor —en un comentario, un nombre de perfil, un mensaje, una reseña— y se ejecuta en el</a:t>
+            </a:r>
+          </a:p>
+          <a:p>
+            <a:pPr>
+              <a:spcAft>
+                <a:spcPts val="600"/>
+              </a:spcAft>
+            </a:pPr>
+            <a:r>
+              <a:rPr sz="1500">
+                <a:solidFill>
+                  <a:srgbClr val="22282E"/>
+                </a:solidFill>
+              </a:rPr>
+              <a:t>•  navegador de cada usuario que ve ese contenido, sin necesidad de engañar a nadie con un</a:t>
+            </a:r>
+          </a:p>
+          <a:p>
+            <a:pPr>
+              <a:spcAft>
+                <a:spcPts val="600"/>
+              </a:spcAft>
+            </a:pPr>
+            <a:r>
+              <a:rPr sz="1500">
+                <a:solidFill>
+                  <a:srgbClr val="22282E"/>
+                </a:solidFill>
+              </a:rPr>
+              <a:t>•  enlace. A diferencia del reflejado (clase 096), no hace falta phishing: la víctima solo tiene</a:t>
+            </a:r>
+          </a:p>
+          <a:p>
+            <a:pPr>
+              <a:spcAft>
+                <a:spcPts val="600"/>
+              </a:spcAft>
+            </a:pPr>
+            <a:r>
+              <a:rPr sz="1500">
+                <a:solidFill>
+                  <a:srgbClr val="22282E"/>
+                </a:solidFill>
+              </a:rPr>
+              <a:t>•  que visitar una página legítima del sitio. Un payload almacenado en un foro popular puede</a:t>
+            </a:r>
+          </a:p>
+          <a:p>
+            <a:pPr>
+              <a:spcAft>
+                <a:spcPts val="600"/>
+              </a:spcAft>
+            </a:pPr>
+            <a:r>
+              <a:rPr sz="1500">
+                <a:solidFill>
+                  <a:srgbClr val="22282E"/>
+                </a:solidFill>
+              </a:rPr>
+              <a:t>•  comprometer a miles de usuarios, e incluso propagarse como un gusano si el script publica</a:t>
+            </a:r>
+          </a:p>
+          <a:p>
+            <a:pPr>
+              <a:spcAft>
+                <a:spcPts val="600"/>
+              </a:spcAft>
+            </a:pPr>
+            <a:r>
+              <a:rPr sz="1500">
+                <a:solidFill>
+                  <a:srgbClr val="22282E"/>
+                </a:solidFill>
+              </a:rPr>
+              <a:t>•  más contenido malicioso en nombre de cada víctima que lo ejecuta —así funcionó el histórico</a:t>
             </a:r>
           </a:p>
         </p:txBody>
@@ -4241,7 +4602,7 @@
                   <a:srgbClr val="0B3D2E"/>
                 </a:solidFill>
               </a:rPr>
-              <a:t>🧰 Herramientas y preparación</a:t>
+              <a:t>📖 Definiciones y características</a:t>
             </a:r>
           </a:p>
         </p:txBody>
@@ -4279,37 +4640,82 @@
                   <a:srgbClr val="22282E"/>
                 </a:solidFill>
               </a:rPr>
-              <a:t>•  Juice Shop (varios retos de stored/DOM XSS) y PortSwigger labs.</a:t>
-            </a:r>
-          </a:p>
-          <a:p>
-            <a:pPr>
-              <a:spcAft>
-                <a:spcPts val="600"/>
-              </a:spcAft>
-            </a:pPr>
-            <a:r>
-              <a:rPr sz="1500">
-                <a:solidFill>
-                  <a:srgbClr val="22282E"/>
-                </a:solidFill>
-              </a:rPr>
-              <a:t>•  Burp y DevTools (breakpoints en sinks).</a:t>
-            </a:r>
-          </a:p>
-          <a:p>
-            <a:pPr>
-              <a:spcAft>
-                <a:spcPts val="600"/>
-              </a:spcAft>
-            </a:pPr>
-            <a:r>
-              <a:rPr sz="1500">
-                <a:solidFill>
-                  <a:srgbClr val="22282E"/>
-                </a:solidFill>
-              </a:rPr>
-              <a:t>•  Extensión mental de "seguir el dato": de dónde viene y dónde acaba.</a:t>
+              <a:t>•  Stored XSS: el payload se guarda en el servidor y se sirve a otros. Característica: no requiere enlace; se dispara solo al ver el contenido.</a:t>
+            </a:r>
+          </a:p>
+          <a:p>
+            <a:pPr>
+              <a:spcAft>
+                <a:spcPts val="600"/>
+              </a:spcAft>
+            </a:pPr>
+            <a:r>
+              <a:rPr sz="1500">
+                <a:solidFill>
+                  <a:srgbClr val="22282E"/>
+                </a:solidFill>
+              </a:rPr>
+              <a:t>•  DOM XSS: el flujo peligroso ocurre en el JavaScript del cliente. Característica: el servidor puede no ver nunca el payload.</a:t>
+            </a:r>
+          </a:p>
+          <a:p>
+            <a:pPr>
+              <a:spcAft>
+                <a:spcPts val="600"/>
+              </a:spcAft>
+            </a:pPr>
+            <a:r>
+              <a:rPr sz="1500">
+                <a:solidFill>
+                  <a:srgbClr val="22282E"/>
+                </a:solidFill>
+              </a:rPr>
+              <a:t>•  Source: entrada controlable en el DOM (location.hash, document.referrer). Característica: origen del dato no confiable.</a:t>
+            </a:r>
+          </a:p>
+          <a:p>
+            <a:pPr>
+              <a:spcAft>
+                <a:spcPts val="600"/>
+              </a:spcAft>
+            </a:pPr>
+            <a:r>
+              <a:rPr sz="1500">
+                <a:solidFill>
+                  <a:srgbClr val="22282E"/>
+                </a:solidFill>
+              </a:rPr>
+              <a:t>•  Sink: función que ejecuta/inserta datos (innerHTML, eval). Característica: punto donde detona el XSS.</a:t>
+            </a:r>
+          </a:p>
+          <a:p>
+            <a:pPr>
+              <a:spcAft>
+                <a:spcPts val="600"/>
+              </a:spcAft>
+            </a:pPr>
+            <a:r>
+              <a:rPr sz="1500">
+                <a:solidFill>
+                  <a:srgbClr val="22282E"/>
+                </a:solidFill>
+              </a:rPr>
+              <a:t>•  DOMPurify: librería que sanitiza HTML en el cliente. Característica: defensa fiable frente a DOM XSS.</a:t>
+            </a:r>
+          </a:p>
+          <a:p>
+            <a:pPr>
+              <a:spcAft>
+                <a:spcPts val="600"/>
+              </a:spcAft>
+            </a:pPr>
+            <a:r>
+              <a:rPr sz="1500">
+                <a:solidFill>
+                  <a:srgbClr val="22282E"/>
+                </a:solidFill>
+              </a:rPr>
+              <a:t>•  Trusted Types: API del navegador que restringe asignaciones peligrosas. Característica: previene sinks inseguros por diseño.</a:t>
             </a:r>
           </a:p>
         </p:txBody>
@@ -4360,7 +4766,7 @@
                   <a:srgbClr val="0B3D2E"/>
                 </a:solidFill>
               </a:rPr>
-              <a:t>🧪 Laboratorio guiado</a:t>
+              <a:t>📔 Glosario</a:t>
             </a:r>
           </a:p>
         </p:txBody>
@@ -4398,97 +4804,97 @@
                   <a:srgbClr val="22282E"/>
                 </a:solidFill>
               </a:rPr>
-              <a:t>•  Stored: en Juice Shop, busca un campo persistente (comentario, nombre de usuario) y guarda &lt;img src=x onerror=alert(1)&gt;.</a:t>
-            </a:r>
-          </a:p>
-          <a:p>
-            <a:pPr>
-              <a:spcAft>
-                <a:spcPts val="600"/>
-              </a:spcAft>
-            </a:pPr>
-            <a:r>
-              <a:rPr sz="1500">
-                <a:solidFill>
-                  <a:srgbClr val="22282E"/>
-                </a:solidFill>
-              </a:rPr>
-              <a:t>•  Verifica que el payload se ejecuta al recargar la página desde otra sesión.</a:t>
-            </a:r>
-          </a:p>
-          <a:p>
-            <a:pPr>
-              <a:spcAft>
-                <a:spcPts val="600"/>
-              </a:spcAft>
-            </a:pPr>
-            <a:r>
-              <a:rPr sz="1500">
-                <a:solidFill>
-                  <a:srgbClr val="22282E"/>
-                </a:solidFill>
-              </a:rPr>
-              <a:t>•  DOM XSS: localiza en el JS un sink como element.innerHTML = location.hash.slice(1).</a:t>
-            </a:r>
-          </a:p>
-          <a:p>
-            <a:pPr>
-              <a:spcAft>
-                <a:spcPts val="600"/>
-              </a:spcAft>
-            </a:pPr>
-            <a:r>
-              <a:rPr sz="1500">
-                <a:solidFill>
-                  <a:srgbClr val="22282E"/>
-                </a:solidFill>
-              </a:rPr>
-              <a:t>•  Construye la URL con el payload en el #hash y confirma la ejecución.</a:t>
-            </a:r>
-          </a:p>
-          <a:p>
-            <a:pPr>
-              <a:spcAft>
-                <a:spcPts val="600"/>
-              </a:spcAft>
-            </a:pPr>
-            <a:r>
-              <a:rPr sz="1500">
-                <a:solidFill>
-                  <a:srgbClr val="22282E"/>
-                </a:solidFill>
-              </a:rPr>
-              <a:t>•  Usa DevTools para poner un breakpoint en el sink y observar el flujo del dato.</a:t>
-            </a:r>
-          </a:p>
-          <a:p>
-            <a:pPr>
-              <a:spcAft>
-                <a:spcPts val="600"/>
-              </a:spcAft>
-            </a:pPr>
-            <a:r>
-              <a:rPr sz="1500">
-                <a:solidFill>
-                  <a:srgbClr val="22282E"/>
-                </a:solidFill>
-              </a:rPr>
-              <a:t>•  Escala el impacto: en lugar de alert, haz que el script realice una acción autenticada (cambiar email) en el lab.</a:t>
-            </a:r>
-          </a:p>
-          <a:p>
-            <a:pPr>
-              <a:spcAft>
-                <a:spcPts val="600"/>
-              </a:spcAft>
-            </a:pPr>
-            <a:r>
-              <a:rPr sz="1500">
-                <a:solidFill>
-                  <a:srgbClr val="22282E"/>
-                </a:solidFill>
-              </a:rPr>
-              <a:t>•  Documenta source, sink, payload y el impacto.</a:t>
+              <a:t>•  Término — Definición concisa</a:t>
+            </a:r>
+          </a:p>
+          <a:p>
+            <a:pPr>
+              <a:spcAft>
+                <a:spcPts val="600"/>
+              </a:spcAft>
+            </a:pPr>
+            <a:r>
+              <a:rPr sz="1500">
+                <a:solidFill>
+                  <a:srgbClr val="22282E"/>
+                </a:solidFill>
+              </a:rPr>
+              <a:t>•  XSS almacenado (stored) — El payload se guarda y se ejecuta para cada visitante</a:t>
+            </a:r>
+          </a:p>
+          <a:p>
+            <a:pPr>
+              <a:spcAft>
+                <a:spcPts val="600"/>
+              </a:spcAft>
+            </a:pPr>
+            <a:r>
+              <a:rPr sz="1500">
+                <a:solidFill>
+                  <a:srgbClr val="22282E"/>
+                </a:solidFill>
+              </a:rPr>
+              <a:t>•  Persistencia — El payload vive en el servidor sin necesidad de engaño</a:t>
+            </a:r>
+          </a:p>
+          <a:p>
+            <a:pPr>
+              <a:spcAft>
+                <a:spcPts val="600"/>
+              </a:spcAft>
+            </a:pPr>
+            <a:r>
+              <a:rPr sz="1500">
+                <a:solidFill>
+                  <a:srgbClr val="22282E"/>
+                </a:solidFill>
+              </a:rPr>
+              <a:t>•  Gusano XSS — Payload que se propaga publicándose a sí mismo</a:t>
+            </a:r>
+          </a:p>
+          <a:p>
+            <a:pPr>
+              <a:spcAft>
+                <a:spcPts val="600"/>
+              </a:spcAft>
+            </a:pPr>
+            <a:r>
+              <a:rPr sz="1500">
+                <a:solidFill>
+                  <a:srgbClr val="22282E"/>
+                </a:solidFill>
+              </a:rPr>
+              <a:t>•  DOM XSS — Vulnerabilidad enteramente en el JavaScript del cliente</a:t>
+            </a:r>
+          </a:p>
+          <a:p>
+            <a:pPr>
+              <a:spcAft>
+                <a:spcPts val="600"/>
+              </a:spcAft>
+            </a:pPr>
+            <a:r>
+              <a:rPr sz="1500">
+                <a:solidFill>
+                  <a:srgbClr val="22282E"/>
+                </a:solidFill>
+              </a:rPr>
+              <a:t>•  Source — Dato controlable por el atacante (location.hash, referrer)</a:t>
+            </a:r>
+          </a:p>
+          <a:p>
+            <a:pPr>
+              <a:spcAft>
+                <a:spcPts val="600"/>
+              </a:spcAft>
+            </a:pPr>
+            <a:r>
+              <a:rPr sz="1500">
+                <a:solidFill>
+                  <a:srgbClr val="22282E"/>
+                </a:solidFill>
+              </a:rPr>
+              <a:t>•  Sink — Función que interpreta el dato como código o HTML</a:t>
             </a:r>
           </a:p>
         </p:txBody>
@@ -4539,7 +4945,7 @@
                   <a:srgbClr val="0B3D2E"/>
                 </a:solidFill>
               </a:rPr>
-              <a:t>✍️ Ejercicios</a:t>
+              <a:t>🧰 Herramientas y preparación</a:t>
             </a:r>
           </a:p>
         </p:txBody>
@@ -4577,82 +4983,37 @@
                   <a:srgbClr val="22282E"/>
                 </a:solidFill>
               </a:rPr>
-              <a:t>•  Enumera 5 sinks peligrosos en JavaScript y por qué lo son.</a:t>
-            </a:r>
-          </a:p>
-          <a:p>
-            <a:pPr>
-              <a:spcAft>
-                <a:spcPts val="600"/>
-              </a:spcAft>
-            </a:pPr>
-            <a:r>
-              <a:rPr sz="1500">
-                <a:solidFill>
-                  <a:srgbClr val="22282E"/>
-                </a:solidFill>
-              </a:rPr>
-              <a:t>•  Explica por qué el stored XSS es más grave que el reflejado.</a:t>
-            </a:r>
-          </a:p>
-          <a:p>
-            <a:pPr>
-              <a:spcAft>
-                <a:spcPts val="600"/>
-              </a:spcAft>
-            </a:pPr>
-            <a:r>
-              <a:rPr sz="1500">
-                <a:solidFill>
-                  <a:srgbClr val="22282E"/>
-                </a:solidFill>
-              </a:rPr>
-              <a:t>•  Encuentra un DOM XSS donde el servidor nunca vea el payload y explícalo.</a:t>
-            </a:r>
-          </a:p>
-          <a:p>
-            <a:pPr>
-              <a:spcAft>
-                <a:spcPts val="600"/>
-              </a:spcAft>
-            </a:pPr>
-            <a:r>
-              <a:rPr sz="1500">
-                <a:solidFill>
-                  <a:srgbClr val="22282E"/>
-                </a:solidFill>
-              </a:rPr>
-              <a:t>•  Sanitiza un campo con DOMPurify y demuestra que bloquea tu payload.</a:t>
-            </a:r>
-          </a:p>
-          <a:p>
-            <a:pPr>
-              <a:spcAft>
-                <a:spcPts val="600"/>
-              </a:spcAft>
-            </a:pPr>
-            <a:r>
-              <a:rPr sz="1500">
-                <a:solidFill>
-                  <a:srgbClr val="22282E"/>
-                </a:solidFill>
-              </a:rPr>
-              <a:t>•  Investiga cómo React mitiga XSS por defecto y cuándo dangerouslySetInnerHTML lo reintroduce.</a:t>
-            </a:r>
-          </a:p>
-          <a:p>
-            <a:pPr>
-              <a:spcAft>
-                <a:spcPts val="600"/>
-              </a:spcAft>
-            </a:pPr>
-            <a:r>
-              <a:rPr sz="1500">
-                <a:solidFill>
-                  <a:srgbClr val="22282E"/>
-                </a:solidFill>
-              </a:rPr>
-              <a:t>•  Diseña una CSP con Trusted Types para el lab.</a:t>
+              <a:t>•  Juice Shop (varios retos de stored/DOM XSS) y PortSwigger labs.</a:t>
+            </a:r>
+          </a:p>
+          <a:p>
+            <a:pPr>
+              <a:spcAft>
+                <a:spcPts val="600"/>
+              </a:spcAft>
+            </a:pPr>
+            <a:r>
+              <a:rPr sz="1500">
+                <a:solidFill>
+                  <a:srgbClr val="22282E"/>
+                </a:solidFill>
+              </a:rPr>
+              <a:t>•  Burp y DevTools (breakpoints en sinks).</a:t>
+            </a:r>
+          </a:p>
+          <a:p>
+            <a:pPr>
+              <a:spcAft>
+                <a:spcPts val="600"/>
+              </a:spcAft>
+            </a:pPr>
+            <a:r>
+              <a:rPr sz="1500">
+                <a:solidFill>
+                  <a:srgbClr val="22282E"/>
+                </a:solidFill>
+              </a:rPr>
+              <a:t>•  Extensión mental de "seguir el dato": de dónde viene y dónde acaba.</a:t>
             </a:r>
           </a:p>
         </p:txBody>
@@ -4703,7 +5064,7 @@
                   <a:srgbClr val="0B3D2E"/>
                 </a:solidFill>
               </a:rPr>
-              <a:t>📝 Reto verificable</a:t>
+              <a:t>🧪 Laboratorio guiado</a:t>
             </a:r>
           </a:p>
         </p:txBody>
@@ -4741,22 +5102,97 @@
                   <a:srgbClr val="22282E"/>
                 </a:solidFill>
               </a:rPr>
-              <a:t>•  Logra un XSS almacenado en Juice Shop que ejecute una acción en nombre de otro usuario (no solo alert), y luego propón la corrección con sanitización.</a:t>
-            </a:r>
-          </a:p>
-          <a:p>
-            <a:pPr>
-              <a:spcAft>
-                <a:spcPts val="600"/>
-              </a:spcAft>
-            </a:pPr>
-            <a:r>
-              <a:rPr sz="1500">
-                <a:solidFill>
-                  <a:srgbClr val="22282E"/>
-                </a:solidFill>
-              </a:rPr>
-              <a:t>•  Criterio de aceptación: demuestras el payload persistente disparándose en una segunda sesión y realizando una acción, e identificas el source, el sink y la defensa concreta.</a:t>
+              <a:t>•  Stored: en Juice Shop, busca un campo persistente (comentario, nombre de usuario) y guarda &lt;img src=x onerror=alert(1)&gt;.</a:t>
+            </a:r>
+          </a:p>
+          <a:p>
+            <a:pPr>
+              <a:spcAft>
+                <a:spcPts val="600"/>
+              </a:spcAft>
+            </a:pPr>
+            <a:r>
+              <a:rPr sz="1500">
+                <a:solidFill>
+                  <a:srgbClr val="22282E"/>
+                </a:solidFill>
+              </a:rPr>
+              <a:t>•  Verifica que el payload se ejecuta al recargar la página desde otra sesión.</a:t>
+            </a:r>
+          </a:p>
+          <a:p>
+            <a:pPr>
+              <a:spcAft>
+                <a:spcPts val="600"/>
+              </a:spcAft>
+            </a:pPr>
+            <a:r>
+              <a:rPr sz="1500">
+                <a:solidFill>
+                  <a:srgbClr val="22282E"/>
+                </a:solidFill>
+              </a:rPr>
+              <a:t>•  DOM XSS: localiza en el JS un sink como element.innerHTML = location.hash.slice(1).</a:t>
+            </a:r>
+          </a:p>
+          <a:p>
+            <a:pPr>
+              <a:spcAft>
+                <a:spcPts val="600"/>
+              </a:spcAft>
+            </a:pPr>
+            <a:r>
+              <a:rPr sz="1500">
+                <a:solidFill>
+                  <a:srgbClr val="22282E"/>
+                </a:solidFill>
+              </a:rPr>
+              <a:t>•  Construye la URL con el payload en el #hash y confirma la ejecución.</a:t>
+            </a:r>
+          </a:p>
+          <a:p>
+            <a:pPr>
+              <a:spcAft>
+                <a:spcPts val="600"/>
+              </a:spcAft>
+            </a:pPr>
+            <a:r>
+              <a:rPr sz="1500">
+                <a:solidFill>
+                  <a:srgbClr val="22282E"/>
+                </a:solidFill>
+              </a:rPr>
+              <a:t>•  Usa DevTools para poner un breakpoint en el sink y observar el flujo del dato.</a:t>
+            </a:r>
+          </a:p>
+          <a:p>
+            <a:pPr>
+              <a:spcAft>
+                <a:spcPts val="600"/>
+              </a:spcAft>
+            </a:pPr>
+            <a:r>
+              <a:rPr sz="1500">
+                <a:solidFill>
+                  <a:srgbClr val="22282E"/>
+                </a:solidFill>
+              </a:rPr>
+              <a:t>•  Escala el impacto: en lugar de alert, haz que el script realice una acción autenticada (cambiar email) en el lab.</a:t>
+            </a:r>
+          </a:p>
+          <a:p>
+            <a:pPr>
+              <a:spcAft>
+                <a:spcPts val="600"/>
+              </a:spcAft>
+            </a:pPr>
+            <a:r>
+              <a:rPr sz="1500">
+                <a:solidFill>
+                  <a:srgbClr val="22282E"/>
+                </a:solidFill>
+              </a:rPr>
+              <a:t>•  Documenta source, sink, payload y el impacto.</a:t>
             </a:r>
           </a:p>
         </p:txBody>
